--- a/public/fun/pack/pptx/reviewpro/보장점검양식프리미엄_39_부모님점검_미드나잇실버.pptx
+++ b/public/fun/pack/pptx/reviewpro/보장점검양식프리미엄_39_부모님점검_미드나잇실버.pptx
@@ -112,12 +112,12 @@
   <p:extLst>
     <p:ext uri="{521415D9-36F7-43E2-AB2F-B90AF26B5E84}">
       <p14:sectionLst xmlns:p14="http://schemas.microsoft.com/office/powerpoint/2010/main">
-        <p14:section name="시작" id="{3F147B4E-C917-4DC9-9215-F94C12A6B235}">
+        <p14:section name="시작" id="{171A0487-24F4-4823-AA22-BF0338040E8B}">
           <p14:sldIdLst>
             <p14:sldId id="256"/>
           </p14:sldIdLst>
         </p14:section>
-        <p14:section name="본문" id="{EB05814E-2D79-43A9-A205-5BE6DA818295}">
+        <p14:section name="본문" id="{224C34CA-F11D-4AC1-9B49-0EF7AFEA593A}">
           <p14:sldIdLst>
             <p14:sldId id="257"/>
             <p14:sldId id="258"/>
@@ -3076,7 +3076,7 @@
             </a:lvl1pPr>
           </a:lstStyle>
           <a:p>
-            <a:fld id="{E6A5AA50-3AE5-4891-9CA7-CF981C7A7E41}" type="slidenum">
+            <a:fld id="{793EA3BF-E019-4491-A77B-B721215F7E7D}" type="slidenum">
               <a:rPr lang="en-US"/>
               <a:t>‹#›</a:t>
             </a:fld>
@@ -5205,7 +5205,7 @@
             </a:lvl1pPr>
           </a:lstStyle>
           <a:p>
-            <a:fld id="{CF5CF2B2-6A90-418D-A89F-18DA3A83733E}" type="slidenum">
+            <a:fld id="{84D11E99-1770-4F98-9242-5889AFC49FAD}" type="slidenum">
               <a:rPr lang="en-US"/>
               <a:t>‹#›</a:t>
             </a:fld>
@@ -5834,7 +5834,7 @@
             </a:lvl1pPr>
           </a:lstStyle>
           <a:p>
-            <a:fld id="{BB7571D6-1BA5-46D6-A1FE-44C45CA52C87}" type="slidenum">
+            <a:fld id="{5ED20990-3F61-411A-AB1E-DC42A554C635}" type="slidenum">
               <a:rPr lang="en-US"/>
               <a:t>‹#›</a:t>
             </a:fld>
@@ -6687,7 +6687,7 @@
           <a:p>
             <a:r>
               <a:rPr lang="ko-KR"/>
-              <a:t>부모님 점검 · 0000. 00. 00</a:t>
+              <a:t>부모님 점검 · 날짜 입력</a:t>
             </a:r>
           </a:p>
           <a:p>
@@ -6778,7 +6778,7 @@
           <a:bodyPr/>
           <a:lstStyle/>
           <a:p>
-            <a:fld id="{EAF0A833-BDAE-47F0-AAE1-112576B13CCF}" type="slidenum">
+            <a:fld id="{DBDF5717-3039-4615-B65D-B366A2AF97A6}" type="slidenum">
               <a:rPr lang="en-US"/>
               <a:t>‹#›</a:t>
             </a:fld>
@@ -7491,7 +7491,7 @@
           <a:bodyPr/>
           <a:lstStyle/>
           <a:p>
-            <a:fld id="{29BF553F-C474-420F-8122-291E9FF20593}" type="slidenum">
+            <a:fld id="{0B0BA792-9B04-4DE4-A7F5-9625271E2C5F}" type="slidenum">
               <a:rPr lang="en-US"/>
               <a:t>‹#›</a:t>
             </a:fld>
@@ -8997,7 +8997,7 @@
           <a:bodyPr/>
           <a:lstStyle/>
           <a:p>
-            <a:fld id="{D94AA9C5-49FE-4860-81F5-1DCE5B6056BF}" type="slidenum">
+            <a:fld id="{93C243FA-F626-4392-BBD9-B3F66ECBB3FE}" type="slidenum">
               <a:rPr lang="en-US"/>
               <a:t>‹#›</a:t>
             </a:fld>
@@ -10547,7 +10547,7 @@
           <a:bodyPr/>
           <a:lstStyle/>
           <a:p>
-            <a:fld id="{56AF5FCA-680A-4B97-8B6A-E03D935A34C5}" type="slidenum">
+            <a:fld id="{BB75599D-2409-413C-B9CA-E1DA06FF1DD2}" type="slidenum">
               <a:rPr lang="en-US"/>
               <a:t>‹#›</a:t>
             </a:fld>
@@ -11424,7 +11424,7 @@
           <a:bodyPr/>
           <a:lstStyle/>
           <a:p>
-            <a:fld id="{AB3CE6FB-CE1C-4B1C-8C05-E723246A130A}" type="slidenum">
+            <a:fld id="{60B77AF4-E5F7-425A-94DB-5CD3079D1350}" type="slidenum">
               <a:rPr lang="en-US"/>
               <a:t>‹#›</a:t>
             </a:fld>
